--- a/assets/pptx/catalog-369.pptx
+++ b/assets/pptx/catalog-369.pptx
@@ -3609,7 +3609,7 @@
                 <a:ea typeface="Ebrima"/>
                 <a:cs typeface="Ebrima"/>
               </a:rPr>
-              <a:t>አዝ ኢየሩሳሌም (2x) እንገባለን</a:t>
+              <a:t>አዝ ኢየሩሳሌም 2x እንገባለን</a:t>
             </a:r>
           </a:p>
           <a:p>
@@ -3645,7 +3645,7 @@
                 <a:ea typeface="Ebrima"/>
                 <a:cs typeface="Ebrima"/>
               </a:rPr>
-              <a:t>ሃሌሉያ ሃሌ ሃሌ (3x) ኢየሱስ</a:t>
+              <a:t>ሃሌሉያ ሃሌ ሃሌ 3x ኢየሱስ</a:t>
             </a:r>
           </a:p>
           <a:p>
@@ -3730,7 +3730,7 @@
                 <a:ea typeface="Ebrima"/>
                 <a:cs typeface="Ebrima"/>
               </a:rPr>
-              <a:t>ሃሌሉያ ሃሌ ሃሌ (3x) ኢየሱስ</a:t>
+              <a:t>ሃሌሉያ ሃሌ ሃሌ 3x ኢየሱስ</a:t>
             </a:r>
           </a:p>
           <a:p>
